--- a/docs/presentaciones/classes/clase-107-vanishing-exploding-gradients-presentacion.pptx
+++ b/docs/presentaciones/classes/clase-107-vanishing-exploding-gradients-presentacion.pptx
@@ -4823,7 +4823,7 @@
                 </a:solidFill>
                 <a:latin typeface="Segoe UI"/>
               </a:rPr>
-              <a:t>Primer bloque ejecutable del notebook.</a:t>
+              <a:t>En las colas (|x| &gt; 5) la derivada σ(x)·(1-σ(x)) es ≈ 0. Multiplicar 0.25 diez veces ya aniquila el gradiente.</a:t>
             </a:r>
           </a:p>
         </p:txBody>
@@ -4910,7 +4910,197 @@
                 </a:solidFill>
                 <a:latin typeface="Courier New"/>
               </a:rPr>
-              <a:t># Imports y configuración inicial</a:t>
+              <a:t>import numpy as np</a:t>
+            </a:r>
+          </a:p>
+          <a:p>
+            <a:pPr>
+              <a:defRPr sz="1200" b="0">
+                <a:solidFill>
+                  <a:srgbClr val="F8FAFC"/>
+                </a:solidFill>
+                <a:latin typeface="Courier New"/>
+              </a:defRPr>
+            </a:pPr>
+            <a:r>
+              <a:rPr sz="1200" b="0">
+                <a:solidFill>
+                  <a:srgbClr val="F8FAFC"/>
+                </a:solidFill>
+                <a:latin typeface="Courier New"/>
+              </a:rPr>
+              <a:t>import matplotlib.pyplot as plt</a:t>
+            </a:r>
+          </a:p>
+          <a:p>
+            <a:pPr>
+              <a:defRPr sz="1200" b="0">
+                <a:solidFill>
+                  <a:srgbClr val="F8FAFC"/>
+                </a:solidFill>
+                <a:latin typeface="Courier New"/>
+              </a:defRPr>
+            </a:pPr>
+            <a:r>
+              <a:rPr sz="1200" b="0">
+                <a:solidFill>
+                  <a:srgbClr val="F8FAFC"/>
+                </a:solidFill>
+                <a:latin typeface="Courier New"/>
+              </a:rPr>
+              <a:t>from tensorflow import keras</a:t>
+            </a:r>
+          </a:p>
+          <a:p>
+            <a:pPr>
+              <a:defRPr sz="1200" b="0">
+                <a:solidFill>
+                  <a:srgbClr val="F8FAFC"/>
+                </a:solidFill>
+                <a:latin typeface="Courier New"/>
+              </a:defRPr>
+            </a:pPr>
+            <a:r>
+              <a:rPr sz="1200" b="0">
+                <a:solidFill>
+                  <a:srgbClr val="F8FAFC"/>
+                </a:solidFill>
+                <a:latin typeface="Courier New"/>
+              </a:rPr>
+              <a:t>from tensorflow.keras import layers</a:t>
+            </a:r>
+          </a:p>
+          <a:p>
+            <a:pPr>
+              <a:defRPr sz="1200" b="0">
+                <a:solidFill>
+                  <a:srgbClr val="F8FAFC"/>
+                </a:solidFill>
+                <a:latin typeface="Courier New"/>
+              </a:defRPr>
+            </a:pPr>
+            <a:r>
+              <a:rPr sz="1200" b="0">
+                <a:solidFill>
+                  <a:srgbClr val="F8FAFC"/>
+                </a:solidFill>
+                <a:latin typeface="Courier New"/>
+              </a:rPr>
+              <a:t>keras.utils.set_random_seed(42)</a:t>
+            </a:r>
+          </a:p>
+          <a:p>
+            <a:pPr>
+              <a:defRPr sz="1200" b="0">
+                <a:solidFill>
+                  <a:srgbClr val="F8FAFC"/>
+                </a:solidFill>
+                <a:latin typeface="Courier New"/>
+              </a:defRPr>
+            </a:pPr>
+            <a:r>
+              <a:rPr sz="1200" b="0">
+                <a:solidFill>
+                  <a:srgbClr val="F8FAFC"/>
+                </a:solidFill>
+                <a:latin typeface="Courier New"/>
+              </a:rPr>
+              <a:t> </a:t>
+            </a:r>
+          </a:p>
+          <a:p>
+            <a:pPr>
+              <a:defRPr sz="1200" b="0">
+                <a:solidFill>
+                  <a:srgbClr val="F8FAFC"/>
+                </a:solidFill>
+                <a:latin typeface="Courier New"/>
+              </a:defRPr>
+            </a:pPr>
+            <a:r>
+              <a:rPr sz="1200" b="0">
+                <a:solidFill>
+                  <a:srgbClr val="F8FAFC"/>
+                </a:solidFill>
+                <a:latin typeface="Courier New"/>
+              </a:rPr>
+              <a:t>x = np.linspace(-10, 10, 500)</a:t>
+            </a:r>
+          </a:p>
+          <a:p>
+            <a:pPr>
+              <a:defRPr sz="1200" b="0">
+                <a:solidFill>
+                  <a:srgbClr val="F8FAFC"/>
+                </a:solidFill>
+                <a:latin typeface="Courier New"/>
+              </a:defRPr>
+            </a:pPr>
+            <a:r>
+              <a:rPr sz="1200" b="0">
+                <a:solidFill>
+                  <a:srgbClr val="F8FAFC"/>
+                </a:solidFill>
+                <a:latin typeface="Courier New"/>
+              </a:rPr>
+              <a:t>sig = 1 / (1 + np.exp(-x))</a:t>
+            </a:r>
+          </a:p>
+          <a:p>
+            <a:pPr>
+              <a:defRPr sz="1200" b="0">
+                <a:solidFill>
+                  <a:srgbClr val="F8FAFC"/>
+                </a:solidFill>
+                <a:latin typeface="Courier New"/>
+              </a:defRPr>
+            </a:pPr>
+            <a:r>
+              <a:rPr sz="1200" b="0">
+                <a:solidFill>
+                  <a:srgbClr val="F8FAFC"/>
+                </a:solidFill>
+                <a:latin typeface="Courier New"/>
+              </a:rPr>
+              <a:t>dsig = sig * (1 - sig)                       # derivada de la sigmoide</a:t>
+            </a:r>
+          </a:p>
+          <a:p>
+            <a:pPr>
+              <a:defRPr sz="1200" b="0">
+                <a:solidFill>
+                  <a:srgbClr val="F8FAFC"/>
+                </a:solidFill>
+                <a:latin typeface="Courier New"/>
+              </a:defRPr>
+            </a:pPr>
+            <a:r>
+              <a:rPr sz="1200" b="0">
+                <a:solidFill>
+                  <a:srgbClr val="F8FAFC"/>
+                </a:solidFill>
+                <a:latin typeface="Courier New"/>
+              </a:rPr>
+              <a:t>print("derivada máxima:", round(dsig.max(), 4), "en x =", round(x[dsig.argmax()], 2))</a:t>
+            </a:r>
+          </a:p>
+          <a:p>
+            <a:pPr>
+              <a:defRPr sz="1200" b="0">
+                <a:solidFill>
+                  <a:srgbClr val="F8FAFC"/>
+                </a:solidFill>
+                <a:latin typeface="Courier New"/>
+              </a:defRPr>
+            </a:pPr>
+            <a:r>
+              <a:rPr sz="1200" b="0">
+                <a:solidFill>
+                  <a:srgbClr val="F8FAFC"/>
+                </a:solidFill>
+                <a:latin typeface="Courier New"/>
+              </a:rPr>
+              <a:t>print("(0.25)^10 =", 0.25 ** 10, "→ 10 capas sigmoide casi anulan el gradiente")</a:t>
             </a:r>
           </a:p>
         </p:txBody>

--- a/docs/presentaciones/classes/clase-107-vanishing-exploding-gradients-presentacion.pptx
+++ b/docs/presentaciones/classes/clase-107-vanishing-exploding-gradients-presentacion.pptx
@@ -3272,7 +3272,7 @@
                 </a:solidFill>
                 <a:latin typeface="Segoe UI"/>
               </a:rPr>
-              <a:t>Parte: 2 — Deep Learning · Fuente: Géron, cap. 11 § The Vanishing/Exploding Gradients Problems.  Duración estimada: 70 min.</a:t>
+              <a:t>Parte: 2 — Deep Learning · Fuente: Géron, cap. 11 § The Vanishing/Exploding Gradients Problems.  Duración estimada: 70 min. · Nivel: Avanzado</a:t>
             </a:r>
           </a:p>
         </p:txBody>
@@ -3581,7 +3581,7 @@
                 </a:solidFill>
                 <a:latin typeface="Segoe UI"/>
               </a:rPr>
-              <a:t>Parte: 2 — Deep Learning · Fuente: Géron, cap. 11 § The Vanishing/Exploding Gradients Problems.  Duración estimada: 70 min.</a:t>
+              <a:t>Parte: 2 — Deep Learning · Fuente: Géron, cap. 11 § The Vanishing/Exploding Gradients Problems.  Duración estimada: 70 min. · Nivel: Avanzado</a:t>
             </a:r>
           </a:p>
         </p:txBody>
